--- a/Base/Tema3_Capacita_limiti_affidabilita_AI.pptx
+++ b/Base/Tema3_Capacita_limiti_affidabilita_AI.pptx
@@ -2293,8 +2293,34 @@
           <a:p>
             <a:r>
               <a:rPr lang="en-US" dirty="0"/>
-              <a:t>Le distorsioni possono entrare nel sistema in tre punti. Il primo sono i dati di addestramento. I modelli apprendono da testi e immagini prodotti da persone, che riflettono la società con le sue disuguaglianze e i suoi stereotipi. Inoltre i dati non sono equilibrati: alcune lingue, culture, punti di vista e gruppi sono molto più rappresentati di altri. Ciò che è sovrarappresentato tende a diventare il 'normale' per il modello. Il secondo è il processo di addestramento e affinamento. Le scelte su quali dati includere, come filtrarli, quali comportamenti premiare durante l'affinamento con feedback umano possono introdurre ulteriori orientamenti, anche con l'intento di correggerne altri. Il terzo è il contesto d'uso: le istruzioni di sistema, la formulazione delle nostre domande, i documenti che forniamo. Anche questi possono orientare le risposte in una direzione. Un esempio storico istruttivo, anche se precedente all'AI generativa: nel 2018 Reuters riportò che Amazon aveva abbandonato un sistema sperimentale di selezione dei curricula, addestrato sulle assunzioni dei dieci anni precedenti, in prevalenza maschili. Il sistema aveva imparato a penalizzare i curricula che contenevano la parola 'women's', come in 'capitana della squadra femminile di scacchi'. Nessuno lo aveva programmato per discriminare: lo aveva appreso dai dati.</a:t>
-            </a:r>
+              <a:t>Le distorsioni possono entrare nel sistema in tre punti. Il primo sono i dati di addestramento. I modelli apprendono da testi e immagini prodotti da persone, che riflettono la società con le sue disuguaglianze e i suoi stereotipi. Inoltre i dati non sono equilibrati: alcune lingue, culture, punti di vista e gruppi sono molto più rappresentati di altri. Ciò che è sovrarappresentato tende a diventare il 'normale' per il modello. Il secondo è il processo di addestramento e affinamento. Le scelte su quali dati includere, come filtrarli, quali comportamenti premiare durante l'affinamento con feedback umano possono introdurre ulteriori orientamenti, anche con l'intento di correggerne altri. Il terzo è il contesto d'uso: le istruzioni di sistema, la formulazione delle nostre domande, i documenti che forniamo. Anche questi possono orientare le risposte in una direzione. Un esempio storico istruttivo, anche se precedente all'AI generativa: nel 2018 Reuters riportò che Amazon aveva abbandonato un sistema sperimentale di selezione dei curricula, addestrato sulle assunzioni dei dieci anni precedenti, in prevalenza maschili. Il sistema aveva imparato a penalizzare i curricula che contenevano la parola 'women's', come in 'capitana della squadra femminile di scacchi'. Nessuno lo aveva programmato per discriminare: lo aveva appreso dai </a:t>
+            </a:r>
+            <a:r>
+              <a:rPr lang="en-US" dirty="0" err="1"/>
+              <a:t>dati</a:t>
+            </a:r>
+            <a:r>
+              <a:rPr lang="en-US" dirty="0"/>
+              <a:t>.</a:t>
+            </a:r>
+          </a:p>
+          <a:p>
+            <a:endParaRPr lang="en-US" dirty="0"/>
+          </a:p>
+          <a:p>
+            <a:r>
+              <a:rPr lang="it-IT" dirty="0"/>
+              <a:t>il caso Amazon è un esempio storico di un </a:t>
+            </a:r>
+            <a:r>
+              <a:rPr lang="it-IT" b="1" dirty="0"/>
+              <a:t>sistema sperimentale </a:t>
+            </a:r>
+            <a:r>
+              <a:rPr lang="it-IT" dirty="0"/>
+              <a:t>di selezione, non una dimostrazione che tutti gli strumenti AI per le risorse umane siano discriminatori.</a:t>
+            </a:r>
+            <a:endParaRPr lang="en-US" dirty="0"/>
           </a:p>
         </p:txBody>
       </p:sp>
@@ -2554,8 +2580,26 @@
           <a:p>
             <a:r>
               <a:rPr lang="en-US" dirty="0"/>
-              <a:t>Le distorsioni non vengono solo dai dati: possiamo introdurle noi, con il modo in cui formuliamo le richieste. Un modello linguistico prosegue e sviluppa il contesto che riceve, quindi una domanda orientata tende a produrre una risposta orientata. L'esempio in slide lo mostra. Se chiediamo 'Perché il fornitore A è la scelta migliore?', la domanda presuppone già la conclusione, e il sistema tenderà a elencare argomenti a favore di A. Se chiediamo 'Quali sono vantaggi e svantaggi dei fornitori A e B rispetto a questi criteri?', otteniamo un confronto più equilibrato. Lo stesso vale per i documenti che forniamo: se diamo al sistema solo materiali favorevoli a una tesi, la sua sintesi rifletterà quella tesi. E vale per le istruzioni di sistema impostate da chi configura lo strumento. La conseguenza pratica: quando usiamo l'AI per analizzare, confrontare o valutare, formulare richieste neutre, esplicitare i criteri, chiedere anche gli argomenti contrari. Le tecniche di formulazione sono sviluppate nel Tema 6; qui ci interessa la consapevolezza del meccanismo.</a:t>
-            </a:r>
+              <a:t>Le distorsioni non vengono solo dai dati: possiamo introdurle noi, con il modo in cui formuliamo le richieste. Un modello linguistico prosegue e sviluppa il contesto che riceve, quindi una domanda orientata tende a produrre una risposta orientata. L'esempio in slide lo mostra. Se chiediamo 'Perché il fornitore A è la scelta migliore?', la domanda presuppone già la conclusione, e il sistema tenderà a elencare argomenti a favore di A. Se chiediamo 'Quali sono vantaggi e svantaggi dei fornitori A e B rispetto a questi criteri?', otteniamo un confronto più equilibrato. Lo stesso vale per i documenti che forniamo: se diamo al sistema solo materiali favorevoli a una tesi, la sua sintesi rifletterà quella tesi. E vale per le istruzioni di sistema impostate da chi configura lo strumento. La conseguenza pratica: quando usiamo l'AI per analizzare, confrontare o valutare, formulare richieste neutre, esplicitare i criteri, chiedere anche gli argomenti contrari. Le tecniche di formulazione sono sviluppate nel Tema 6; qui ci interessa la consapevolezza del </a:t>
+            </a:r>
+            <a:r>
+              <a:rPr lang="en-US" dirty="0" err="1"/>
+              <a:t>meccanismo</a:t>
+            </a:r>
+            <a:r>
+              <a:rPr lang="en-US" dirty="0"/>
+              <a:t>.</a:t>
+            </a:r>
+          </a:p>
+          <a:p>
+            <a:endParaRPr lang="en-US" dirty="0"/>
+          </a:p>
+          <a:p>
+            <a:r>
+              <a:rPr lang="it-IT" dirty="0"/>
+              <a:t>La formulazione delle richieste, le informazioni fornite e i criteri espliciti aiutano a ottenere confronti più equilibrati.</a:t>
+            </a:r>
+            <a:endParaRPr lang="en-US" dirty="0"/>
           </a:p>
         </p:txBody>
       </p:sp>
@@ -3076,8 +3120,34 @@
           <a:p>
             <a:r>
               <a:rPr lang="en-US" dirty="0"/>
-              <a:t>Lo stesso modello può funzionare molto bene in un compito e male in un altro, anche se i due compiti sembrano simili. È la 'frontiera tecnologica frastagliata' descritta da Dell'Acqua e colleghi in uno studio su 758 consulenti, pubblicato nel 2026 sulla rivista Organization Science e citato anche nel Tema 1: compiti apparentemente simili possono stare da parti opposte del confine di ciò che l'AI sa fare bene. Lo schema in slide propone un profilo qualitativo di un ipotetico assistente generico: non sono misure, ma un modo per visualizzare l'idea. Ottimo nel riformulare e correggere testi, molto buono nelle sintesi e nelle traduzioni, buono nell'estrarre dati da documenti ben strutturati, più incerto su calcoli complessi senza strumenti, su fatti specifici senza fonti e su conteggi precisi. Perché? Perché le prestazioni dipendono da quanto il compito somiglia a ciò che il modello ha visto in addestramento, da quanto richiede conoscenze precise rispetto a competenze linguistiche, da quanto il risultato richiede esattezza assoluta, e dalla disponibilità di strumenti adatti. Il profilo reale varia da sistema a sistema e cambia con gli aggiornamenti. La conseguenza pratica è importante: non si può dire 'questo modello è affidabile' in generale. Si può dire, al massimo, 'questo sistema si è dimostrato affidabile per questo compito, in queste condizioni'.</a:t>
-            </a:r>
+              <a:t>Lo stesso modello può funzionare molto bene in un compito e male in un altro, anche se i due compiti sembrano simili. È la 'frontiera tecnologica frastagliata' descritta da Dell'Acqua e colleghi in uno studio su 758 consulenti, pubblicato nel 2026 sulla rivista Organization Science e citato anche nel Tema 1: compiti apparentemente simili possono stare da parti opposte del confine di ciò che l'AI sa fare bene. Lo schema in slide propone un profilo qualitativo di un ipotetico assistente generico: non sono misure, ma un modo per visualizzare l'idea. Ottimo nel riformulare e correggere testi, molto buono nelle sintesi e nelle traduzioni, buono nell'estrarre dati da documenti ben strutturati, più incerto su calcoli complessi senza strumenti, su fatti specifici senza fonti e su conteggi precisi. Perché? Perché le prestazioni dipendono da quanto il compito somiglia a ciò che il modello ha visto in addestramento, da quanto richiede conoscenze precise rispetto a competenze linguistiche, da quanto il risultato richiede esattezza assoluta, e dalla disponibilità di strumenti adatti. Il profilo reale varia da sistema a sistema e cambia con gli aggiornamenti. La conseguenza pratica è importante: non si può dire 'questo modello è affidabile' in generale. Si può dire, al massimo, 'questo sistema si è dimostrato affidabile per questo compito, in </a:t>
+            </a:r>
+            <a:r>
+              <a:rPr lang="en-US" dirty="0" err="1"/>
+              <a:t>queste</a:t>
+            </a:r>
+            <a:r>
+              <a:rPr lang="en-US" dirty="0"/>
+              <a:t> </a:t>
+            </a:r>
+            <a:r>
+              <a:rPr lang="en-US" dirty="0" err="1"/>
+              <a:t>condizioni</a:t>
+            </a:r>
+            <a:r>
+              <a:rPr lang="en-US" dirty="0"/>
+              <a:t>’.</a:t>
+            </a:r>
+          </a:p>
+          <a:p>
+            <a:endParaRPr lang="en-US" dirty="0"/>
+          </a:p>
+          <a:p>
+            <a:r>
+              <a:rPr lang="it-IT" dirty="0"/>
+              <a:t>un sistema con strumenti di calcolo e accesso alle fonti può comportarsi in modo molto diverso da uno che produce soltanto testo.</a:t>
+            </a:r>
+            <a:endParaRPr lang="en-US" dirty="0"/>
           </a:p>
         </p:txBody>
       </p:sp>
@@ -3424,7 +3494,62 @@
           <a:p>
             <a:r>
               <a:rPr lang="en-US" dirty="0"/>
-              <a:t>Se benchmark e dimostrazioni non bastano, come si valuta un sistema per un uso specifico? Senza entrare in metodologie quantitative, possiamo indicare un approccio semplice, applicabile anche da chi non è tecnico. Primo: definire con precisione il compito e che cosa si intende per risultato buono. Secondo: raccogliere un insieme di casi reali, rappresentativi della varietà che incontreremo, compresi i casi difficili, insoliti e ambigui, non solo quelli tipici. Terzo: confrontare i risultati del sistema con quelli attesi, possibilmente con il giudizio di una persona competente. Quarto: annotare dove e come il sistema sbaglia: non conta solo quanti errori fa, ma di che tipo sono, quanto sono gravi e quanto sono facili da individuare. Quinto: ripetere la valutazione nel tempo, perché modelli, applicazioni e dati cambiano. Un esempio: prima di usare l'AI per estrarre dati dalle fatture dei fornitori, provarla su cinquanta fatture reali di formati diversi, comprese quelle scansionate male, e controllare campo per campo. Questo approccio porta a una conclusione molto più utile di qualunque benchmark generico. La progettazione strutturata di queste valutazioni, con criteri di successo e insuccesso definiti prima, è trattata nel Tema 15.</a:t>
+              <a:t>Se benchmark e dimostrazioni non bastano, come si valuta un sistema per un uso specifico? Senza entrare in metodologie quantitative, possiamo indicare un approccio semplice, applicabile anche da chi non è tecnico. </a:t>
+            </a:r>
+          </a:p>
+          <a:p>
+            <a:r>
+              <a:rPr lang="en-US" dirty="0"/>
+              <a:t>Primo: definire con precisione il compito e che cosa si intende per risultato </a:t>
+            </a:r>
+            <a:r>
+              <a:rPr lang="en-US" dirty="0" err="1"/>
+              <a:t>buono</a:t>
+            </a:r>
+            <a:r>
+              <a:rPr lang="en-US" dirty="0"/>
+              <a:t>.</a:t>
+            </a:r>
+          </a:p>
+          <a:p>
+            <a:r>
+              <a:rPr lang="en-US" dirty="0"/>
+              <a:t>Secondo: raccogliere un insieme di casi reali, rappresentativi della varietà che incontreremo, compresi i casi difficili, insoliti e ambigui, non solo quelli tipici. </a:t>
+            </a:r>
+          </a:p>
+          <a:p>
+            <a:r>
+              <a:rPr lang="en-US" dirty="0"/>
+              <a:t>Terzo: confrontare i risultati del sistema con quelli attesi, possibilmente con il giudizio di una persona competente. </a:t>
+            </a:r>
+          </a:p>
+          <a:p>
+            <a:r>
+              <a:rPr lang="en-US" dirty="0"/>
+              <a:t>Quarto: annotare dove e come il sistema sbaglia: non conta solo quanti errori fa, ma di che tipo sono, quanto sono gravi e quanto sono facili da individuare. </a:t>
+            </a:r>
+          </a:p>
+          <a:p>
+            <a:r>
+              <a:rPr lang="en-US" dirty="0"/>
+              <a:t>Quinto: ripetere la valutazione nel tempo, perché modelli, applicazioni e dati </a:t>
+            </a:r>
+            <a:r>
+              <a:rPr lang="en-US" dirty="0" err="1"/>
+              <a:t>cambiano</a:t>
+            </a:r>
+            <a:r>
+              <a:rPr lang="en-US" dirty="0"/>
+              <a:t>.</a:t>
+            </a:r>
+          </a:p>
+          <a:p>
+            <a:endParaRPr lang="en-US" dirty="0"/>
+          </a:p>
+          <a:p>
+            <a:r>
+              <a:rPr lang="en-US" dirty="0"/>
+              <a:t> Un esempio: prima di usare l'AI per estrarre dati dalle fatture dei fornitori, provarla su cinquanta fatture reali di formati diversi, comprese quelle scansionate male, e controllare campo per campo. Questo approccio porta a una conclusione molto più utile di qualunque benchmark generico. La progettazione strutturata di queste valutazioni, con criteri di successo e insuccesso definiti prima, è trattata nel Tema 15.</a:t>
             </a:r>
           </a:p>
         </p:txBody>
@@ -4555,8 +4680,26 @@
           <a:p>
             <a:r>
               <a:rPr lang="en-US" dirty="0"/>
-              <a:t>Ecco i sette fattori principali. La scelta del modello e le caratteristiche del sistema: modelli diversi hanno capacità diverse, e lo stesso modello si comporta diversamente in applicazioni diverse. La complessità e l'ambiguità del compito: più un compito è complesso, insolito o ambiguo, più aumenta la probabilità di errore. La qualità delle informazioni disponibili: documenti chiari, aggiornati e corretti producono risultati migliori di materiali confusi, incompleti o contraddittori. La formulazione delle istruzioni: richieste chiare, specifiche, con obiettivo, contesto e formato atteso, producono risultati migliori di richieste vaghe. La quantità e la pertinenza del contesto: il contesto giusto aiuta, quello eccessivo o non pertinente può confondere. La disponibilità di strumenti e fonti esterne: ricerca, esecuzione di codice, accesso a basi documentali cambiano molto l'affidabilità per certi compiti. Le differenze tra ambiti applicativi: le prestazioni variano tra settori e domini, come vedremo. Notate che almeno quattro di questi fattori dipendono in gran parte da noi: la scelta dello strumento adatto, la qualità delle informazioni che forniamo, la formulazione delle istruzioni e il contesto.</a:t>
-            </a:r>
+              <a:t>Ecco i sette fattori principali. La scelta del modello e le caratteristiche del sistema: modelli diversi hanno capacità diverse, e lo stesso modello si comporta diversamente in applicazioni diverse. La complessità e l'ambiguità del compito: più un compito è complesso, insolito o ambiguo, più aumenta la probabilità di errore. La qualità delle informazioni disponibili: documenti chiari, aggiornati e corretti producono risultati migliori di materiali confusi, incompleti o contraddittori. La formulazione delle istruzioni: richieste chiare, specifiche, con obiettivo, contesto e formato atteso, producono risultati migliori di richieste vaghe. La quantità e la pertinenza del contesto: il contesto giusto aiuta, quello eccessivo o non pertinente può confondere. La disponibilità di strumenti e fonti esterne: ricerca, esecuzione di codice, accesso a basi documentali cambiano molto l'affidabilità per certi compiti. Le differenze tra ambiti applicativi: le prestazioni variano tra settori e domini, come vedremo. Notate che almeno quattro di questi fattori dipendono in gran parte da noi: la scelta dello strumento adatto, la qualità delle informazioni che forniamo, la formulazione delle istruzioni e il </a:t>
+            </a:r>
+            <a:r>
+              <a:rPr lang="en-US" dirty="0" err="1"/>
+              <a:t>contesto</a:t>
+            </a:r>
+            <a:r>
+              <a:rPr lang="en-US" dirty="0"/>
+              <a:t>.</a:t>
+            </a:r>
+          </a:p>
+          <a:p>
+            <a:endParaRPr lang="en-US" dirty="0"/>
+          </a:p>
+          <a:p>
+            <a:r>
+              <a:rPr lang="it-IT" dirty="0"/>
+              <a:t>La qualità dei risultati non dipende soltanto dalla potenza del modello: informazioni, contesto, istruzioni e strumenti appropriati possono migliorarla significativamente.</a:t>
+            </a:r>
+            <a:endParaRPr lang="en-US" dirty="0"/>
           </a:p>
         </p:txBody>
       </p:sp>
@@ -5862,6 +6005,16 @@
               <a:rPr lang="en-US" dirty="0"/>
               <a:t>Riassumiamo gli otto risultati attesi. Il partecipante dovrebbe essere in grado di: riconoscere le principali capacità dei sistemi AI e associarle a tipologie di attività; comprendere perché un sistema possa produrre risposte plausibili ma errate; identificare possibili bias e distorsioni; distinguere la qualità espressiva di una risposta dalla sua correttezza; comprendere che l'affidabilità dipende da modello, compito e contesto; riconoscere quando verificare le informazioni con fonti indipendenti o controlli appropriati; valutare se il livello di affidabilità è compatibile con le conseguenze di un errore; distinguere i compiti supportabili dall'AI da quelli che richiedono maggiore controllo o competenze specialistiche. Insieme, questi risultati compongono la capacità che abbiamo chiamato calibrare la fiducia.</a:t>
             </a:r>
+          </a:p>
+          <a:p>
+            <a:endParaRPr lang="en-US" dirty="0"/>
+          </a:p>
+          <a:p>
+            <a:r>
+              <a:rPr lang="it-IT"/>
+              <a:t>Il valore dell'AI non dipende dall'assenza assoluta di errori, ma dalla capacità di ottenere risultati utili e sufficientemente affidabili per lo scopo, con controlli proporzionati.</a:t>
+            </a:r>
+            <a:endParaRPr lang="en-US" dirty="0"/>
           </a:p>
         </p:txBody>
       </p:sp>
@@ -9341,7 +9494,7 @@
                   <a:schemeClr val="tx1"/>
                 </a:solidFill>
               </a:rPr>
-              <a:t>Tre cautele</a:t>
+              <a:t>Come ottenere risultati migliori</a:t>
             </a:r>
             <a:endParaRPr lang="it-IT" sz="1400" dirty="0"/>
           </a:p>
@@ -9406,9 +9559,12 @@
                   <a:schemeClr val="tx1"/>
                 </a:solidFill>
               </a:rPr>
-              <a:t>Un errore in un passaggio intermedio compromette la conclusione</a:t>
-            </a:r>
-            <a:endParaRPr lang="it-IT" sz="1200" dirty="0"/>
+              <a:t>Scomporre il problema e verificare i passaggi </a:t>
+            </a:r>
+            <a:r>
+              <a:rPr lang="it-IT" sz="1200" dirty="0"/>
+              <a:t>decisivi</a:t>
+            </a:r>
           </a:p>
         </p:txBody>
       </p:sp>
@@ -9462,7 +9618,7 @@
           <a:bodyPr wrap="square" lIns="0" tIns="0" rIns="0" bIns="0" rtlCol="0" anchor="ctr"/>
           <a:lstStyle/>
           <a:p>
-            <a:pPr marL="0" indent="0">
+            <a:pPr marL="0" indent="0" algn="just">
               <a:buNone/>
             </a:pPr>
             <a:r>
@@ -9471,7 +9627,7 @@
                   <a:schemeClr val="tx1"/>
                 </a:solidFill>
               </a:rPr>
-              <a:t>I calcoli generati come testo sono meno affidabili di quelli eseguiti con strumenti</a:t>
+              <a:t>Utilizzare strumenti di calcolo o codice quando serve una precisione numerica</a:t>
             </a:r>
             <a:endParaRPr lang="it-IT" sz="1200" dirty="0"/>
           </a:p>
@@ -9527,7 +9683,7 @@
           <a:bodyPr wrap="square" lIns="0" tIns="0" rIns="0" bIns="0" rtlCol="0" anchor="ctr"/>
           <a:lstStyle/>
           <a:p>
-            <a:pPr marL="0" indent="0">
+            <a:pPr marL="0" indent="0" algn="just">
               <a:buNone/>
             </a:pPr>
             <a:r>
@@ -9536,7 +9692,23 @@
                   <a:schemeClr val="tx1"/>
                 </a:solidFill>
               </a:rPr>
-              <a:t>Le prestazioni sono irregolari: anche un problema semplice può essere sbagliato</a:t>
+              <a:t>Valutare i risultati sui problemi concreti, </a:t>
+            </a:r>
+            <a:r>
+              <a:rPr lang="it-IT" sz="1200" dirty="0" err="1">
+                <a:solidFill>
+                  <a:schemeClr val="tx1"/>
+                </a:solidFill>
+              </a:rPr>
+              <a:t>senzabasarsi</a:t>
+            </a:r>
+            <a:r>
+              <a:rPr lang="it-IT" sz="1200" dirty="0">
+                <a:solidFill>
+                  <a:schemeClr val="tx1"/>
+                </a:solidFill>
+              </a:rPr>
+              <a:t> soltanto sulla difficoltà apparente</a:t>
             </a:r>
             <a:endParaRPr lang="it-IT" sz="1200" dirty="0"/>
           </a:p>
@@ -11975,7 +12147,7 @@
                   <a:schemeClr val="tx2"/>
                 </a:solidFill>
               </a:rPr>
-              <a:t>Senza vincoli reali (budget, persone, scadenze) il piano può essere elegante ma irrealistico.</a:t>
+              <a:t>Fornire obiettivi, risorse, budget e scadenze permette all’AI di elaborare piani più pertinenti e utilizzabili.</a:t>
             </a:r>
             <a:endParaRPr lang="it-IT" sz="1200" dirty="0"/>
           </a:p>
@@ -12127,7 +12299,7 @@
                   <a:schemeClr val="tx2"/>
                 </a:solidFill>
               </a:rPr>
-              <a:t>Il confronto riflette i criteri dati o impliciti e la formulazione della domanda.</a:t>
+              <a:t>Definire criteri espliciti aiuta a confrontare le alternative in modo più trasparente e strutturato.</a:t>
             </a:r>
             <a:endParaRPr lang="it-IT" sz="1200" dirty="0"/>
           </a:p>
@@ -12718,7 +12890,7 @@
         </p:nvSpPr>
         <p:spPr>
           <a:xfrm>
-            <a:off x="640080" y="3822192"/>
+            <a:off x="640080" y="3772051"/>
             <a:ext cx="7863840" cy="411480"/>
           </a:xfrm>
           <a:prstGeom prst="rect">
@@ -12740,7 +12912,7 @@
                   <a:schemeClr val="bg1"/>
                 </a:solidFill>
               </a:rPr>
-              <a:t>Racconti scritti con idee generate dall'AI: giudicati più creativi singolarmente, ma più simili tra loro.</a:t>
+              <a:t>L'AI può ampliare e accelerare la generazione di idee. Per ottenere maggiore varietà è utile esplorare prospettive differenti e integrare il contributo umano.</a:t>
             </a:r>
             <a:endParaRPr lang="it-IT" sz="1400" dirty="0"/>
           </a:p>
@@ -16019,7 +16191,7 @@
         </p:nvSpPr>
         <p:spPr>
           <a:xfrm>
-            <a:off x="621792" y="1810512"/>
+            <a:off x="621792" y="1728216"/>
             <a:ext cx="2292096" cy="612648"/>
           </a:xfrm>
           <a:prstGeom prst="rect">
@@ -16032,7 +16204,7 @@
           <a:bodyPr wrap="square" lIns="0" tIns="0" rIns="0" bIns="0" rtlCol="0" anchor="t"/>
           <a:lstStyle/>
           <a:p>
-            <a:pPr marL="0" indent="0">
+            <a:pPr marL="0" indent="0" algn="just">
               <a:buNone/>
             </a:pPr>
             <a:r>
@@ -16041,7 +16213,7 @@
                   <a:schemeClr val="tx2"/>
                 </a:solidFill>
               </a:rPr>
-              <a:t>Nessun meccanismo interno verifica ogni affermazione</a:t>
+              <a:t>La generazione di una risposta non garantisce che ogni affermazione venga verificata rispetto a fonti affidabili.</a:t>
             </a:r>
             <a:endParaRPr lang="it-IT" sz="1200" dirty="0"/>
           </a:p>
@@ -16685,7 +16857,7 @@
                   <a:schemeClr val="tx1"/>
                 </a:solidFill>
               </a:rPr>
-              <a:t>I sistemi recenti allucinano in genere meno, soprattutto con ricerca e grounding, ma il fenomeno non è eliminato.</a:t>
+              <a:t>L'utilizzo di fonti pertinenti, strumenti di ricerca e procedure di verifica può ridurre il rischio di informazioni errate.</a:t>
             </a:r>
             <a:endParaRPr lang="it-IT" sz="1300" dirty="0"/>
           </a:p>
@@ -17483,7 +17655,7 @@
                   <a:schemeClr val="accent5"/>
                 </a:solidFill>
               </a:rPr>
-              <a:t>Segnali di forma: ingannevoli</a:t>
+              <a:t>Segnali di forma: non sufficienti</a:t>
             </a:r>
             <a:endParaRPr lang="it-IT" sz="1500" dirty="0"/>
           </a:p>
@@ -18512,7 +18684,7 @@
                   <a:schemeClr val="bg1"/>
                 </a:solidFill>
               </a:rPr>
-              <a:t>Le risposte sbagliate sono scritte bene quanto quelle giuste.</a:t>
+              <a:t>La qualità della scrittura non basta a dimostrare la correttezza: fonti, dati e verifiche sono gli elementi decisivi.</a:t>
             </a:r>
             <a:endParaRPr lang="it-IT" sz="1300" dirty="0"/>
           </a:p>
@@ -18622,7 +18794,15 @@
                   <a:schemeClr val="tx1"/>
                 </a:solidFill>
               </a:rPr>
-              <a:t>Dove le allucinazioni sono più probabili</a:t>
+              <a:t>Attività che richiedono livelli diversi di </a:t>
+            </a:r>
+            <a:r>
+              <a:rPr lang="it-IT" sz="2600" b="1" dirty="0" err="1">
+                <a:solidFill>
+                  <a:schemeClr val="tx1"/>
+                </a:solidFill>
+              </a:rPr>
+              <a:t>verfica</a:t>
             </a:r>
             <a:endParaRPr lang="it-IT" sz="2600" dirty="0"/>
           </a:p>
@@ -19871,7 +20051,7 @@
                   <a:schemeClr val="accent3"/>
                 </a:solidFill>
               </a:rPr>
-              <a:t>I sistemi AI possono riprodurre o amplificare distorsioni: le risposte non sono automaticamente imparziali</a:t>
+              <a:t>Riconoscere le distorsioni permette di valutare meglio i risultati dell'AI e progettare utilizzi più equi e affidabili.</a:t>
             </a:r>
             <a:endParaRPr lang="it-IT" sz="1600" dirty="0"/>
           </a:p>
@@ -21378,7 +21558,7 @@
                   <a:schemeClr val="tx1"/>
                 </a:solidFill>
               </a:rPr>
-              <a:t>Ciò che è sovrarappresentato nei dati tende a diventare il "normale" per il modello.</a:t>
+              <a:t>Dati non rappresentativi e scelte di progettazione possono introdurre distorsioni sistematiche. La valutazione su casi e gruppi differenti aiuta a identificarle.</a:t>
             </a:r>
             <a:endParaRPr lang="it-IT" sz="1400" dirty="0"/>
           </a:p>
@@ -24659,7 +24839,7 @@
                   <a:schemeClr val="tx1"/>
                 </a:solidFill>
               </a:rPr>
-              <a:t>Contromisure: chiedere critiche e obiezioni, non rivelare la propria preferenza.</a:t>
+              <a:t>Per valutare un'ipotesi, chiedere esplicitamente controargomentazioni, alternative ed evidenze contrarie. Quando possibile, presentare il problema senza suggerire la risposta desiderata.</a:t>
             </a:r>
             <a:endParaRPr lang="it-IT" sz="1200" dirty="0"/>
           </a:p>
@@ -26544,7 +26724,7 @@
           <a:bodyPr wrap="square" lIns="0" tIns="0" rIns="0" bIns="0" rtlCol="0" anchor="ctr"/>
           <a:lstStyle/>
           <a:p>
-            <a:pPr marL="0" indent="0">
+            <a:pPr marL="0" indent="0" algn="just">
               <a:buNone/>
             </a:pPr>
             <a:r>
@@ -26553,7 +26733,7 @@
                   <a:schemeClr val="tx1"/>
                 </a:solidFill>
               </a:rPr>
-              <a:t>Accurato al 90% ma poco affidabile, se non sappiamo quando sbaglia</a:t>
+              <a:t>Accurato al 90% nei test, ma non necessariamente affidabile in ogni situazione operativa.</a:t>
             </a:r>
             <a:endParaRPr lang="it-IT" sz="1200" dirty="0"/>
           </a:p>
@@ -29900,7 +30080,23 @@
                   <a:schemeClr val="tx1"/>
                 </a:solidFill>
               </a:rPr>
-              <a:t>Valutare le prestazioni nel contesto reale</a:t>
+              <a:t>Come verificare il valore e l’affidabilità </a:t>
+            </a:r>
+            <a:r>
+              <a:rPr lang="it-IT" sz="2600" b="1" dirty="0" err="1">
+                <a:solidFill>
+                  <a:schemeClr val="tx1"/>
+                </a:solidFill>
+              </a:rPr>
+              <a:t>dell’Ai</a:t>
+            </a:r>
+            <a:r>
+              <a:rPr lang="it-IT" sz="2600" b="1" dirty="0">
+                <a:solidFill>
+                  <a:schemeClr val="tx1"/>
+                </a:solidFill>
+              </a:rPr>
+              <a:t> nei casi reali</a:t>
             </a:r>
             <a:endParaRPr lang="it-IT" sz="2600" dirty="0"/>
           </a:p>
@@ -31783,7 +31979,7 @@
                   <a:schemeClr val="tx1"/>
                 </a:solidFill>
               </a:rPr>
-              <a:t>L'affidabilità complessiva dipende anche dagli anelli più deboli</a:t>
+              <a:t>Fonti, modello, configurazione, strumenti e supervisione contribuiscono insieme alla qualità del risultato.</a:t>
             </a:r>
             <a:endParaRPr lang="it-IT" sz="1400" dirty="0"/>
           </a:p>
@@ -37086,7 +37282,7 @@
         </p:nvSpPr>
         <p:spPr>
           <a:xfrm>
-            <a:off x="4892040" y="4069080"/>
+            <a:off x="4892040" y="3951514"/>
             <a:ext cx="3611880" cy="347472"/>
           </a:xfrm>
           <a:prstGeom prst="rect">
@@ -37124,7 +37320,15 @@
                   <a:schemeClr val="tx1"/>
                 </a:solidFill>
               </a:rPr>
-              <a:t>: più funziona, meno controlliamo</a:t>
+              <a:t>: </a:t>
+            </a:r>
+            <a:r>
+              <a:rPr lang="it-IT" sz="1300" dirty="0">
+                <a:solidFill>
+                  <a:schemeClr val="tx1"/>
+                </a:solidFill>
+              </a:rPr>
+              <a:t>Quando un sistema funziona bene abitualmente, possiamo essere portati a controllarne meno criticamente i risultati.</a:t>
             </a:r>
             <a:endParaRPr lang="it-IT" sz="1300" dirty="0"/>
           </a:p>
@@ -40389,7 +40593,7 @@
           <a:bodyPr wrap="square" lIns="0" tIns="0" rIns="0" bIns="0" rtlCol="0" anchor="t"/>
           <a:lstStyle/>
           <a:p>
-            <a:pPr marL="0" indent="0">
+            <a:pPr marL="0" indent="0" algn="just">
               <a:buNone/>
             </a:pPr>
             <a:r>
@@ -40398,7 +40602,7 @@
                   <a:schemeClr val="tx1"/>
                 </a:solidFill>
               </a:rPr>
-              <a:t>Il sistema non può saperlo: se risponde, inventa</a:t>
+              <a:t>Senza accesso al contratto o a una fonte equivalente, il sistema non dispone degli elementi necessari per fornire una risposta verificabile.</a:t>
             </a:r>
             <a:endParaRPr lang="it-IT" sz="1200" dirty="0"/>
           </a:p>
@@ -42304,7 +42508,7 @@
                   <a:schemeClr val="accent3"/>
                 </a:solidFill>
               </a:rPr>
-              <a:t>Usare l'AI quando prestazioni e controlli sono compatibili con il rischio del compito, non solo quando sembra capace di eseguirlo</a:t>
+              <a:t>Scegliere il livello di utilizzo dell'AI in funzione del valore atteso, dell'affidabilità richiesta e dei controlli disponibili.</a:t>
             </a:r>
             <a:endParaRPr lang="it-IT" sz="1600" dirty="0"/>
           </a:p>
@@ -43981,7 +44185,7 @@
                   <a:schemeClr val="tx1"/>
                 </a:solidFill>
               </a:rPr>
-              <a:t>Usare liberamente</a:t>
+              <a:t>Utilizzo diretto con controllo leggero</a:t>
             </a:r>
             <a:endParaRPr lang="it-IT" sz="1500" dirty="0"/>
           </a:p>
@@ -44392,7 +44596,7 @@
                   <a:schemeClr val="bg1"/>
                 </a:solidFill>
               </a:rPr>
-              <a:t>Limitare o evitare</a:t>
+              <a:t>Utilizzo subordinato a competenze</a:t>
             </a:r>
             <a:endParaRPr lang="it-IT" sz="1500" dirty="0"/>
           </a:p>
@@ -48142,7 +48346,7 @@
                   <a:schemeClr val="bg1"/>
                 </a:solidFill>
               </a:rPr>
-              <a:t>Più autonomia diamo, più alta l'affidabilità dimostrata e più basse le conseguenze degli errori.</a:t>
+              <a:t>Maggiore autonomia richiede affidabilità dimostrata, limiti operativi chiari, monitoraggio e meccanismi per intervenire quando necessario.</a:t>
             </a:r>
             <a:endParaRPr lang="it-IT" sz="1300" dirty="0"/>
           </a:p>
@@ -48252,7 +48456,7 @@
                   <a:schemeClr val="tx1"/>
                 </a:solidFill>
               </a:rPr>
-              <a:t>Quando limitare o evitare l'uso</a:t>
+              <a:t>Quando servono maggiori garanzie o strumenti differenti</a:t>
             </a:r>
             <a:endParaRPr lang="it-IT" sz="2600" dirty="0"/>
           </a:p>
@@ -49381,7 +49585,7 @@
           <a:bodyPr wrap="square" lIns="0" tIns="0" rIns="0" bIns="0" rtlCol="0" anchor="t"/>
           <a:lstStyle/>
           <a:p>
-            <a:pPr marL="0" indent="0">
+            <a:pPr marL="0" indent="0" algn="just">
               <a:buNone/>
             </a:pPr>
             <a:r>
@@ -49390,7 +49594,7 @@
                   <a:schemeClr val="bg1"/>
                 </a:solidFill>
               </a:rPr>
-              <a:t>Quando usiamo un risultato prodotto con l'AI, ne diventiamo responsabili come se l'avessimo prodotto noi.</a:t>
+              <a:t>L'utilizzo dell'AI non elimina le responsabilità di persone e organizzazioni. Chi impiega i risultati deve rispettare gli obblighi applicabili e prevedere controlli adeguati al contesto.</a:t>
             </a:r>
             <a:endParaRPr lang="it-IT" sz="1600" dirty="0"/>
           </a:p>
@@ -51354,16 +51558,24 @@
           <a:bodyPr wrap="square" lIns="0" tIns="0" rIns="0" bIns="0" rtlCol="0" anchor="ctr"/>
           <a:lstStyle/>
           <a:p>
-            <a:pPr marL="0" indent="0">
-              <a:buNone/>
-            </a:pPr>
+            <a:pPr marL="0" indent="0" algn="just">
+              <a:buNone/>
+            </a:pPr>
+            <a:r>
+              <a:rPr lang="it-IT" sz="1300" b="1" dirty="0">
+                <a:solidFill>
+                  <a:schemeClr val="tx1"/>
+                </a:solidFill>
+              </a:rPr>
+              <a:t>Riconoscere le opportunità</a:t>
+            </a:r>
             <a:r>
               <a:rPr lang="it-IT" sz="1300" dirty="0">
                 <a:solidFill>
                   <a:schemeClr val="tx1"/>
                 </a:solidFill>
               </a:rPr>
-              <a:t>Associare le capacità dell'AI a tipologie di attività</a:t>
+              <a:t>: individuare attività in cui le capacità dell'AI possono essere utili.</a:t>
             </a:r>
             <a:endParaRPr lang="it-IT" sz="1300" dirty="0"/>
           </a:p>
@@ -51474,12 +51686,20 @@
               <a:buNone/>
             </a:pPr>
             <a:r>
+              <a:rPr lang="it-IT" sz="1300" b="1" dirty="0">
+                <a:solidFill>
+                  <a:schemeClr val="tx1"/>
+                </a:solidFill>
+              </a:rPr>
+              <a:t>Comprendere i limiti</a:t>
+            </a:r>
+            <a:r>
               <a:rPr lang="it-IT" sz="1300" dirty="0">
                 <a:solidFill>
                   <a:schemeClr val="tx1"/>
                 </a:solidFill>
               </a:rPr>
-              <a:t>Capire perché una risposta plausibile può essere errata</a:t>
+              <a:t>: riconoscere le situazioni in cui sono possibili errori, allucinazioni e distorsioni.</a:t>
             </a:r>
             <a:endParaRPr lang="it-IT" sz="1300" dirty="0"/>
           </a:p>
@@ -51590,28 +51810,20 @@
               <a:buNone/>
             </a:pPr>
             <a:r>
+              <a:rPr lang="it-IT" sz="1300" b="1" dirty="0">
+                <a:solidFill>
+                  <a:schemeClr val="tx1"/>
+                </a:solidFill>
+              </a:rPr>
+              <a:t>Migliorare i risultati</a:t>
+            </a:r>
+            <a:r>
               <a:rPr lang="it-IT" sz="1300" dirty="0">
                 <a:solidFill>
                   <a:schemeClr val="tx1"/>
                 </a:solidFill>
               </a:rPr>
-              <a:t>Identificare possibili </a:t>
-            </a:r>
-            <a:r>
-              <a:rPr lang="it-IT" sz="1300" dirty="0" err="1">
-                <a:solidFill>
-                  <a:schemeClr val="tx1"/>
-                </a:solidFill>
-              </a:rPr>
-              <a:t>bias</a:t>
-            </a:r>
-            <a:r>
-              <a:rPr lang="it-IT" sz="1300" dirty="0">
-                <a:solidFill>
-                  <a:schemeClr val="tx1"/>
-                </a:solidFill>
-              </a:rPr>
-              <a:t> e distorsioni</a:t>
+              <a:t>: utilizzare istruzioni, informazioni, fonti e strumenti appropriati.</a:t>
             </a:r>
             <a:endParaRPr lang="it-IT" sz="1300" dirty="0"/>
           </a:p>
@@ -51722,12 +51934,20 @@
               <a:buNone/>
             </a:pPr>
             <a:r>
+              <a:rPr lang="it-IT" sz="1300" b="1" dirty="0">
+                <a:solidFill>
+                  <a:schemeClr val="tx1"/>
+                </a:solidFill>
+              </a:rPr>
+              <a:t>Valutare l'affidabilità</a:t>
+            </a:r>
+            <a:r>
               <a:rPr lang="it-IT" sz="1300" dirty="0">
                 <a:solidFill>
                   <a:schemeClr val="tx1"/>
                 </a:solidFill>
               </a:rPr>
-              <a:t>Distinguere qualità espressiva e correttezza</a:t>
+              <a:t>: verificare le prestazioni rispetto al compito e alle sue conseguenze.</a:t>
             </a:r>
             <a:endParaRPr lang="it-IT" sz="1300" dirty="0"/>
           </a:p>
@@ -51838,12 +52058,20 @@
               <a:buNone/>
             </a:pPr>
             <a:r>
+              <a:rPr lang="it-IT" sz="1300" b="1" dirty="0">
+                <a:solidFill>
+                  <a:schemeClr val="tx1"/>
+                </a:solidFill>
+              </a:rPr>
+              <a:t>Scegliere il livello di utilizzo</a:t>
+            </a:r>
+            <a:r>
               <a:rPr lang="it-IT" sz="1300" dirty="0">
                 <a:solidFill>
                   <a:schemeClr val="tx1"/>
                 </a:solidFill>
               </a:rPr>
-              <a:t>Capire che l'affidabilità dipende da modello, compito e contesto</a:t>
+              <a:t>: distinguere supporto, supervisione e delega.</a:t>
             </a:r>
             <a:endParaRPr lang="it-IT" sz="1300" dirty="0"/>
           </a:p>
@@ -51851,13 +52079,13 @@
       </p:sp>
       <p:sp>
         <p:nvSpPr>
-          <p:cNvPr id="24" name="risultato 6"/>
+          <p:cNvPr id="28" name="risultato 7"/>
           <p:cNvSpPr/>
           <p:nvPr/>
         </p:nvSpPr>
         <p:spPr>
           <a:xfrm>
-            <a:off x="4663440" y="2788920"/>
+            <a:off x="457200" y="3657600"/>
             <a:ext cx="4023360" cy="749808"/>
           </a:xfrm>
           <a:prstGeom prst="roundRect">
@@ -51866,122 +52094,6 @@
             </a:avLst>
           </a:prstGeom>
           <a:solidFill>
-            <a:schemeClr val="bg2"/>
-          </a:solidFill>
-          <a:ln/>
-        </p:spPr>
-        <p:txBody>
-          <a:bodyPr/>
-          <a:lstStyle/>
-          <a:p>
-            <a:endParaRPr lang="it-IT" dirty="0"/>
-          </a:p>
-        </p:txBody>
-      </p:sp>
-      <p:sp>
-        <p:nvSpPr>
-          <p:cNvPr id="25" name="cerchio FiCheckSquare"/>
-          <p:cNvSpPr/>
-          <p:nvPr/>
-        </p:nvSpPr>
-        <p:spPr>
-          <a:xfrm>
-            <a:off x="4800600" y="2944368"/>
-            <a:ext cx="438912" cy="438912"/>
-          </a:xfrm>
-          <a:prstGeom prst="ellipse">
-            <a:avLst/>
-          </a:prstGeom>
-          <a:solidFill>
-            <a:schemeClr val="accent1"/>
-          </a:solidFill>
-          <a:ln/>
-        </p:spPr>
-        <p:txBody>
-          <a:bodyPr/>
-          <a:lstStyle/>
-          <a:p>
-            <a:endParaRPr lang="it-IT" dirty="0"/>
-          </a:p>
-        </p:txBody>
-      </p:sp>
-      <p:pic>
-        <p:nvPicPr>
-          <p:cNvPr id="26" name="Image 5" descr="FiCheckSquare"/>
-          <p:cNvPicPr>
-            <a:picLocks noChangeAspect="1"/>
-          </p:cNvPicPr>
-          <p:nvPr/>
-        </p:nvPicPr>
-        <p:blipFill>
-          <a:blip r:embed="rId8"/>
-          <a:stretch>
-            <a:fillRect/>
-          </a:stretch>
-        </p:blipFill>
-        <p:spPr>
-          <a:xfrm>
-            <a:off x="4910328" y="3054096"/>
-            <a:ext cx="219456" cy="219456"/>
-          </a:xfrm>
-          <a:prstGeom prst="rect">
-            <a:avLst/>
-          </a:prstGeom>
-        </p:spPr>
-      </p:pic>
-      <p:sp>
-        <p:nvSpPr>
-          <p:cNvPr id="27" name="Text 18"/>
-          <p:cNvSpPr txBox="1"/>
-          <p:nvPr/>
-        </p:nvSpPr>
-        <p:spPr>
-          <a:xfrm>
-            <a:off x="5376672" y="2788920"/>
-            <a:ext cx="3200400" cy="749808"/>
-          </a:xfrm>
-          <a:prstGeom prst="rect">
-            <a:avLst/>
-          </a:prstGeom>
-          <a:noFill/>
-          <a:ln/>
-        </p:spPr>
-        <p:txBody>
-          <a:bodyPr wrap="square" lIns="0" tIns="0" rIns="0" bIns="0" rtlCol="0" anchor="ctr"/>
-          <a:lstStyle/>
-          <a:p>
-            <a:pPr marL="0" indent="0">
-              <a:buNone/>
-            </a:pPr>
-            <a:r>
-              <a:rPr lang="it-IT" sz="1300" dirty="0">
-                <a:solidFill>
-                  <a:schemeClr val="tx1"/>
-                </a:solidFill>
-              </a:rPr>
-              <a:t>Riconoscere quando e come verificare</a:t>
-            </a:r>
-            <a:endParaRPr lang="it-IT" sz="1300" dirty="0"/>
-          </a:p>
-        </p:txBody>
-      </p:sp>
-      <p:sp>
-        <p:nvSpPr>
-          <p:cNvPr id="28" name="risultato 7"/>
-          <p:cNvSpPr/>
-          <p:nvPr/>
-        </p:nvSpPr>
-        <p:spPr>
-          <a:xfrm>
-            <a:off x="457200" y="3657600"/>
-            <a:ext cx="4023360" cy="749808"/>
-          </a:xfrm>
-          <a:prstGeom prst="roundRect">
-            <a:avLst>
-              <a:gd name="adj" fmla="val 9756"/>
-            </a:avLst>
-          </a:prstGeom>
-          <a:solidFill>
             <a:schemeClr val="bg1"/>
           </a:solidFill>
           <a:ln/>
@@ -51991,209 +52103,6 @@
           <a:lstStyle/>
           <a:p>
             <a:endParaRPr lang="it-IT" dirty="0"/>
-          </a:p>
-        </p:txBody>
-      </p:sp>
-      <p:sp>
-        <p:nvSpPr>
-          <p:cNvPr id="29" name="cerchio FiSliders"/>
-          <p:cNvSpPr/>
-          <p:nvPr/>
-        </p:nvSpPr>
-        <p:spPr>
-          <a:xfrm>
-            <a:off x="594360" y="3813048"/>
-            <a:ext cx="438912" cy="438912"/>
-          </a:xfrm>
-          <a:prstGeom prst="ellipse">
-            <a:avLst/>
-          </a:prstGeom>
-          <a:solidFill>
-            <a:schemeClr val="accent1"/>
-          </a:solidFill>
-          <a:ln/>
-        </p:spPr>
-        <p:txBody>
-          <a:bodyPr/>
-          <a:lstStyle/>
-          <a:p>
-            <a:endParaRPr lang="it-IT" dirty="0"/>
-          </a:p>
-        </p:txBody>
-      </p:sp>
-      <p:pic>
-        <p:nvPicPr>
-          <p:cNvPr id="30" name="Image 6" descr="FiSliders"/>
-          <p:cNvPicPr>
-            <a:picLocks noChangeAspect="1"/>
-          </p:cNvPicPr>
-          <p:nvPr/>
-        </p:nvPicPr>
-        <p:blipFill>
-          <a:blip r:embed="rId9"/>
-          <a:stretch>
-            <a:fillRect/>
-          </a:stretch>
-        </p:blipFill>
-        <p:spPr>
-          <a:xfrm>
-            <a:off x="704088" y="3922776"/>
-            <a:ext cx="219456" cy="219456"/>
-          </a:xfrm>
-          <a:prstGeom prst="rect">
-            <a:avLst/>
-          </a:prstGeom>
-        </p:spPr>
-      </p:pic>
-      <p:sp>
-        <p:nvSpPr>
-          <p:cNvPr id="31" name="Text 21"/>
-          <p:cNvSpPr txBox="1"/>
-          <p:nvPr/>
-        </p:nvSpPr>
-        <p:spPr>
-          <a:xfrm>
-            <a:off x="1170432" y="3657600"/>
-            <a:ext cx="3200400" cy="749808"/>
-          </a:xfrm>
-          <a:prstGeom prst="rect">
-            <a:avLst/>
-          </a:prstGeom>
-          <a:noFill/>
-          <a:ln/>
-        </p:spPr>
-        <p:txBody>
-          <a:bodyPr wrap="square" lIns="0" tIns="0" rIns="0" bIns="0" rtlCol="0" anchor="ctr"/>
-          <a:lstStyle/>
-          <a:p>
-            <a:pPr marL="0" indent="0">
-              <a:buNone/>
-            </a:pPr>
-            <a:r>
-              <a:rPr lang="it-IT" sz="1300" dirty="0">
-                <a:solidFill>
-                  <a:schemeClr val="tx1"/>
-                </a:solidFill>
-              </a:rPr>
-              <a:t>Valutare l'affidabilità rispetto alle conseguenze di un errore</a:t>
-            </a:r>
-            <a:endParaRPr lang="it-IT" sz="1300" dirty="0"/>
-          </a:p>
-        </p:txBody>
-      </p:sp>
-      <p:sp>
-        <p:nvSpPr>
-          <p:cNvPr id="32" name="risultato 8"/>
-          <p:cNvSpPr/>
-          <p:nvPr/>
-        </p:nvSpPr>
-        <p:spPr>
-          <a:xfrm>
-            <a:off x="4663440" y="3657600"/>
-            <a:ext cx="4023360" cy="749808"/>
-          </a:xfrm>
-          <a:prstGeom prst="roundRect">
-            <a:avLst>
-              <a:gd name="adj" fmla="val 9756"/>
-            </a:avLst>
-          </a:prstGeom>
-          <a:solidFill>
-            <a:schemeClr val="bg1"/>
-          </a:solidFill>
-          <a:ln/>
-        </p:spPr>
-        <p:txBody>
-          <a:bodyPr/>
-          <a:lstStyle/>
-          <a:p>
-            <a:endParaRPr lang="it-IT" dirty="0"/>
-          </a:p>
-        </p:txBody>
-      </p:sp>
-      <p:sp>
-        <p:nvSpPr>
-          <p:cNvPr id="33" name="cerchio FiUserCheck"/>
-          <p:cNvSpPr/>
-          <p:nvPr/>
-        </p:nvSpPr>
-        <p:spPr>
-          <a:xfrm>
-            <a:off x="4800600" y="3813048"/>
-            <a:ext cx="438912" cy="438912"/>
-          </a:xfrm>
-          <a:prstGeom prst="ellipse">
-            <a:avLst/>
-          </a:prstGeom>
-          <a:solidFill>
-            <a:schemeClr val="accent1"/>
-          </a:solidFill>
-          <a:ln/>
-        </p:spPr>
-        <p:txBody>
-          <a:bodyPr/>
-          <a:lstStyle/>
-          <a:p>
-            <a:endParaRPr lang="it-IT" dirty="0"/>
-          </a:p>
-        </p:txBody>
-      </p:sp>
-      <p:pic>
-        <p:nvPicPr>
-          <p:cNvPr id="34" name="Image 7" descr="FiUserCheck"/>
-          <p:cNvPicPr>
-            <a:picLocks noChangeAspect="1"/>
-          </p:cNvPicPr>
-          <p:nvPr/>
-        </p:nvPicPr>
-        <p:blipFill>
-          <a:blip r:embed="rId10"/>
-          <a:stretch>
-            <a:fillRect/>
-          </a:stretch>
-        </p:blipFill>
-        <p:spPr>
-          <a:xfrm>
-            <a:off x="4910328" y="3922776"/>
-            <a:ext cx="219456" cy="219456"/>
-          </a:xfrm>
-          <a:prstGeom prst="rect">
-            <a:avLst/>
-          </a:prstGeom>
-        </p:spPr>
-      </p:pic>
-      <p:sp>
-        <p:nvSpPr>
-          <p:cNvPr id="35" name="Text 24"/>
-          <p:cNvSpPr txBox="1"/>
-          <p:nvPr/>
-        </p:nvSpPr>
-        <p:spPr>
-          <a:xfrm>
-            <a:off x="5376672" y="3657600"/>
-            <a:ext cx="3200400" cy="749808"/>
-          </a:xfrm>
-          <a:prstGeom prst="rect">
-            <a:avLst/>
-          </a:prstGeom>
-          <a:noFill/>
-          <a:ln/>
-        </p:spPr>
-        <p:txBody>
-          <a:bodyPr wrap="square" lIns="0" tIns="0" rIns="0" bIns="0" rtlCol="0" anchor="ctr"/>
-          <a:lstStyle/>
-          <a:p>
-            <a:pPr marL="0" indent="0">
-              <a:buNone/>
-            </a:pPr>
-            <a:r>
-              <a:rPr lang="it-IT" sz="1300" dirty="0">
-                <a:solidFill>
-                  <a:schemeClr val="tx1"/>
-                </a:solidFill>
-              </a:rPr>
-              <a:t>Distinguere compiti supportabili da quelli che richiedono più controllo</a:t>
-            </a:r>
-            <a:endParaRPr lang="it-IT" sz="1300" dirty="0"/>
           </a:p>
         </p:txBody>
       </p:sp>
